--- a/答辩PPT.pptx
+++ b/答辩PPT.pptx
@@ -3365,7 +3365,7 @@
                 </a:solidFill>
                 <a:latin typeface="微软雅黑"/>
               </a:rPr>
-              <a:t>B/S 架构 · NEU 表面缺陷数据库 · OpenCV + 随机森林 + SPC</a:t>
+              <a:t>B/S + C/S 双客户端 · NEU 表面缺陷数据库 · OpenCV + 随机森林 + SPC</a:t>
             </a:r>
           </a:p>
         </p:txBody>
@@ -3680,7 +3680,7 @@
                 </a:solidFill>
                 <a:latin typeface="微软雅黑"/>
               </a:rPr>
-              <a:t>单页走通完整业务流程</a:t>
+              <a:t>B/S 浏览器 + C/S 桌面客户端，双界面走通完整业务流程</a:t>
             </a:r>
           </a:p>
         </p:txBody>
@@ -4850,7 +4850,99 @@
       </p:sp>
       <p:sp>
         <p:nvSpPr>
-          <p:cNvPr id="33" name="TextBox 32"/>
+          <p:cNvPr id="33" name="Rounded Rectangle 32"/>
+          <p:cNvSpPr/>
+          <p:nvPr/>
+        </p:nvSpPr>
+        <p:spPr>
+          <a:xfrm>
+            <a:off x="640080" y="5779008"/>
+            <a:ext cx="10927080" cy="566928"/>
+          </a:xfrm>
+          <a:prstGeom prst="roundRect">
+            <a:avLst/>
+          </a:prstGeom>
+          <a:solidFill>
+            <a:srgbClr val="ECF2F9"/>
+          </a:solidFill>
+          <a:ln>
+            <a:noFill/>
+          </a:ln>
+          <a:effectLst/>
+        </p:spPr>
+        <p:style>
+          <a:lnRef idx="1">
+            <a:schemeClr val="accent1"/>
+          </a:lnRef>
+          <a:fillRef idx="3">
+            <a:schemeClr val="accent1"/>
+          </a:fillRef>
+          <a:effectRef idx="2">
+            <a:schemeClr val="accent1"/>
+          </a:effectRef>
+          <a:fontRef idx="minor">
+            <a:schemeClr val="lt1"/>
+          </a:fontRef>
+        </p:style>
+        <p:txBody>
+          <a:bodyPr rtlCol="0" anchor="ctr"/>
+          <a:lstStyle/>
+          <a:p>
+            <a:pPr algn="ctr"/>
+          </a:p>
+        </p:txBody>
+      </p:sp>
+      <p:sp>
+        <p:nvSpPr>
+          <p:cNvPr id="34" name="TextBox 33"/>
+          <p:cNvSpPr txBox="1"/>
+          <p:nvPr/>
+        </p:nvSpPr>
+        <p:spPr>
+          <a:xfrm>
+            <a:off x="868680" y="5779008"/>
+            <a:ext cx="10515600" cy="566928"/>
+          </a:xfrm>
+          <a:prstGeom prst="rect">
+            <a:avLst/>
+          </a:prstGeom>
+          <a:noFill/>
+        </p:spPr>
+        <p:txBody>
+          <a:bodyPr wrap="square" anchor="ctr" lIns="50800" rIns="50800" tIns="25400" bIns="25400">
+            <a:spAutoFit/>
+          </a:bodyPr>
+          <a:lstStyle/>
+          <a:p>
+            <a:pPr algn="l">
+              <a:lnSpc>
+                <a:spcPct val="100000"/>
+              </a:lnSpc>
+            </a:pPr>
+            <a:r>
+              <a:rPr sz="1300" b="1">
+                <a:solidFill>
+                  <a:srgbClr val="217AD9"/>
+                </a:solidFill>
+                <a:latin typeface="微软雅黑"/>
+              </a:rPr>
+              <a:t>双端同源：</a:t>
+            </a:r>
+            <a:r>
+              <a:rPr sz="1250" b="0">
+                <a:solidFill>
+                  <a:srgbClr val="163A5F"/>
+                </a:solidFill>
+                <a:latin typeface="微软雅黑"/>
+              </a:rPr>
+              <a:t>浏览器(B/S)与桌面客户端(C/S)调用同一套 FastAPI 接口、共用同一 SQLite 数据库，检测记录与看板实时一致。</a:t>
+            </a:r>
+          </a:p>
+        </p:txBody>
+      </p:sp>
+      <p:sp>
+        <p:nvSpPr>
+          <p:cNvPr id="35" name="TextBox 34"/>
           <p:cNvSpPr txBox="1"/>
           <p:nvPr/>
         </p:nvSpPr>
@@ -7054,7 +7146,7 @@
                 </a:solidFill>
                 <a:latin typeface="微软雅黑"/>
               </a:rPr>
-              <a:t>✓ B/S 架构跑通完整业务闭环（上传—检测—入库—统计—追溯）</a:t>
+              <a:t>✓ B/S 浏览器端 + C/S tkinter 桌面端，双端跑通完整业务闭环（上传—检测—入库—统计—追溯）</a:t>
             </a:r>
           </a:p>
           <a:p>
@@ -8078,7 +8170,7 @@
                 </a:solidFill>
                 <a:latin typeface="微软雅黑"/>
               </a:rPr>
-              <a:t>B/S 五层架构与技术栈</a:t>
+              <a:t>B/S+C/S 双端架构与技术栈</a:t>
             </a:r>
           </a:p>
         </p:txBody>
@@ -10894,7 +10986,7 @@
                           </a:solidFill>
                           <a:latin typeface="微软雅黑"/>
                         </a:rPr>
-                        <a:t>④ B/S 全栈集成</a:t>
+                        <a:t>④ 软件体系结构 B/S+C/S</a:t>
                       </a:r>
                     </a:p>
                   </a:txBody>
@@ -10917,7 +11009,7 @@
                           </a:solidFill>
                           <a:latin typeface="微软雅黑"/>
                         </a:rPr>
-                        <a:t>Web服务、前后端分离</a:t>
+                        <a:t>C/S与B/S架构、HTTP/REST</a:t>
                       </a:r>
                     </a:p>
                   </a:txBody>
@@ -10940,7 +11032,7 @@
                           </a:solidFill>
                           <a:latin typeface="微软雅黑"/>
                         </a:rPr>
-                        <a:t>FastAPI + SQLite + 原生JS/ECharts，跑通业务闭环</a:t>
+                        <a:t>同一 FastAPI 服务器同时服务浏览器(B/S)与 tkinter 桌面客户端(C/S)</a:t>
                       </a:r>
                     </a:p>
                   </a:txBody>
@@ -11242,7 +11334,7 @@
                 </a:solidFill>
                 <a:latin typeface="微软雅黑"/>
               </a:rPr>
-              <a:t>B/S 架构 · 前后端分离 · 模块化解耦</a:t>
+              <a:t>B/S + C/S 双客户端架构 · 前后端分离 · 模块化解耦</a:t>
             </a:r>
           </a:p>
         </p:txBody>
@@ -11371,7 +11463,7 @@
                 </a:solidFill>
                 <a:latin typeface="微软雅黑"/>
               </a:rPr>
-              <a:t>浏览器层</a:t>
+              <a:t>客户端层</a:t>
             </a:r>
           </a:p>
         </p:txBody>
@@ -11410,7 +11502,7 @@
                 </a:solidFill>
                 <a:latin typeface="微软雅黑"/>
               </a:rPr>
-              <a:t>index.html  上传图片 / 结果展示 / ECharts看板 / 历史表格</a:t>
+              <a:t>B/S：index.html 浏览器  |  C/S：client/desktop_client.py（tkinter 桌面），均通过 HTTP 调用</a:t>
             </a:r>
           </a:p>
         </p:txBody>
@@ -11622,7 +11714,7 @@
                 </a:solidFill>
                 <a:latin typeface="微软雅黑"/>
               </a:rPr>
-              <a:t>FastAPI：POST /api/detect · GET /api/history · GET /api/stats</a:t>
+              <a:t>FastAPI：POST /api/detect · GET /api/history · GET /api/stats · GET /api/health</a:t>
             </a:r>
           </a:p>
         </p:txBody>
@@ -12059,8 +12151,8 @@
         </p:nvSpPr>
         <p:spPr>
           <a:xfrm>
-            <a:off x="1097280" y="5852160"/>
-            <a:ext cx="9966960" cy="548640"/>
+            <a:off x="1097280" y="5779008"/>
+            <a:ext cx="9966960" cy="658368"/>
           </a:xfrm>
           <a:prstGeom prst="rect">
             <a:avLst/>
@@ -12094,7 +12186,7 @@
                 </a:solidFill>
                 <a:latin typeface="微软雅黑"/>
               </a:rPr>
-              <a:t>FastAPI + Uvicorn（后端） · SQLite（数据库） · OpenCV + scikit-learn（算法） · 原生HTML/JS + ECharts（前端）</a:t>
+              <a:t>FastAPI + Uvicorn（后端） · SQLite（数据库） · OpenCV + scikit-learn（算法） · 原生HTML/JS + ECharts（B/S 前端） · tkinter（C/S 桌面端）</a:t>
             </a:r>
           </a:p>
         </p:txBody>
